--- a/dist/초5/사회·역사/역사와생활/초5_사회·역사_역사와생활_06_광복과6·25전쟁_학생용.pptx
+++ b/dist/초5/사회·역사/역사와생활/초5_사회·역사_역사와생활_06_광복과6·25전쟁_학생용.pptx
@@ -120,13 +120,13 @@
   <p:extLst>
     <p:ext uri="{521415D9-36F7-43E2-AB2F-B90AF26B5E84}">
       <p14:sectionLst xmlns:p14="http://schemas.microsoft.com/office/powerpoint/2010/main">
-        <p14:section name="도입" id="{ca81eaaf-ddcb-30ab-da4c-1d01ef4ad83e}">
+        <p14:section name="도입" id="{fe5c535d-b3db-6e07-3926-606be32b673d}">
           <p14:sldIdLst>
             <p14:sldId id="256"/>
             <p14:sldId id="257"/>
           </p14:sldIdLst>
         </p14:section>
-        <p14:section name="개념" id="{0f89a3df-d264-7239-6153-4c20fff95c12}">
+        <p14:section name="개념" id="{7b04ddf1-f2b7-0f05-fa10-fbbab332f37d}">
           <p14:sldIdLst>
             <p14:sldId id="258"/>
             <p14:sldId id="259"/>
@@ -135,7 +135,7 @@
             <p14:sldId id="264"/>
           </p14:sldIdLst>
         </p14:section>
-        <p14:section name="연습" id="{c44735d5-d34a-8729-6815-dd2b57d8ad43}">
+        <p14:section name="연습" id="{6c0e4a60-a7c8-7b8b-7592-b2f13ed3d1fa}">
           <p14:sldIdLst>
             <p14:sldId id="260"/>
             <p14:sldId id="261"/>
@@ -143,23 +143,23 @@
             <p14:sldId id="266"/>
           </p14:sldIdLst>
         </p14:section>
-        <p14:section name="개념" id="{f25f9d25-d67f-1cd8-088b-edd269f1af4e}">
+        <p14:section name="개념" id="{d082dba0-2a52-73fd-b901-ac06bb777a78}">
           <p14:sldIdLst/>
         </p14:section>
-        <p14:section name="연습" id="{9a65ddaf-ecac-43ae-6292-dd63dee31a7d}">
+        <p14:section name="연습" id="{6d3dd704-d89c-4136-b7ef-8e933ce70125}">
           <p14:sldIdLst/>
         </p14:section>
-        <p14:section name="확인" id="{a448e535-9150-ab20-ab72-5072d8f004bb}">
+        <p14:section name="확인" id="{66af411a-f719-0750-c423-f3d1c9d5603b}">
           <p14:sldIdLst>
             <p14:sldId id="267"/>
           </p14:sldIdLst>
         </p14:section>
-        <p14:section name="정리" id="{8da11639-ff97-eb1b-b95f-3e01a9138279}">
+        <p14:section name="정리" id="{61c690f6-56f5-2c8a-6b9c-03d8bda4a0f5}">
           <p14:sldIdLst>
             <p14:sldId id="268"/>
           </p14:sldIdLst>
         </p14:section>
-        <p14:section name="보충" id="{b97e0995-3fa6-0676-e7e8-e242df6641b6}">
+        <p14:section name="보충" id="{582ed1b7-01ed-582d-a514-19d544d6a968}">
           <p14:sldIdLst>
             <p14:sldId id="269"/>
           </p14:sldIdLst>
